--- a/2-大一下/01 数据结构/PPT（张学）/第四章  串.pptx
+++ b/2-大一下/01 数据结构/PPT（张学）/第四章  串.pptx
@@ -300,7 +300,7 @@
           <a:p>
             <a:fld id="{0C16664E-1BF0-46AE-AAC0-8104A4986E05}" type="datetimeFigureOut">
               <a:rPr lang="zh-CN" altLang="en-US" smtClean="0"/>
-              <a:t>2024/4/3</a:t>
+              <a:t>2025/4/9</a:t>
             </a:fld>
             <a:endParaRPr lang="zh-CN" altLang="en-US"/>
           </a:p>
@@ -5713,7 +5713,22 @@
             <a:pPr lvl="1"/>
             <a:r>
               <a:rPr lang="en-US" altLang="zh-CN" dirty="0"/>
-              <a:t>M</a:t>
+              <a:t>M:</a:t>
+            </a:r>
+            <a:r>
+              <a:rPr lang="zh-CN" altLang="en-US" dirty="0"/>
+              <a:t> </a:t>
+            </a:r>
+            <a:r>
+              <a:rPr lang="en-US" altLang="zh-CN" dirty="0"/>
+              <a:t> J. H. Morris</a:t>
+            </a:r>
+          </a:p>
+          <a:p>
+            <a:pPr lvl="1"/>
+            <a:r>
+              <a:rPr lang="en-US" altLang="zh-CN" dirty="0"/>
+              <a:t>P</a:t>
             </a:r>
             <a:r>
               <a:rPr lang="zh-CN" altLang="en-US" dirty="0"/>
@@ -5722,21 +5737,6 @@
             <a:r>
               <a:rPr lang="en-US" altLang="zh-CN" dirty="0"/>
               <a:t>V. R. Pratt</a:t>
-            </a:r>
-          </a:p>
-          <a:p>
-            <a:pPr lvl="1"/>
-            <a:r>
-              <a:rPr lang="en-US" altLang="zh-CN" dirty="0"/>
-              <a:t>P</a:t>
-            </a:r>
-            <a:r>
-              <a:rPr lang="zh-CN" altLang="en-US" dirty="0"/>
-              <a:t>：</a:t>
-            </a:r>
-            <a:r>
-              <a:rPr lang="en-US" altLang="zh-CN" dirty="0"/>
-              <a:t>J. H. Morris</a:t>
             </a:r>
           </a:p>
           <a:p>
@@ -8438,8 +8438,8 @@
           </a:p>
         </p:txBody>
       </p:sp>
-      <mc:AlternateContent xmlns:mc="http://schemas.openxmlformats.org/markup-compatibility/2006" xmlns:a14="http://schemas.microsoft.com/office/drawing/2010/main">
-        <mc:Choice Requires="a14">
+      <mc:AlternateContent xmlns:mc="http://schemas.openxmlformats.org/markup-compatibility/2006">
+        <mc:Choice xmlns:a14="http://schemas.microsoft.com/office/drawing/2010/main" Requires="a14">
           <p:sp>
             <p:nvSpPr>
               <p:cNvPr id="3" name="内容占位符 2">
@@ -9106,7 +9106,7 @@
             </p:txBody>
           </p:sp>
         </mc:Choice>
-        <mc:Fallback xmlns="">
+        <mc:Fallback>
           <p:sp>
             <p:nvSpPr>
               <p:cNvPr id="3" name="内容占位符 2">
@@ -12745,7 +12745,7 @@
             </a:r>
             <a:r>
               <a:rPr lang="en-US" altLang="zh-CN" dirty="0"/>
-              <a:t>…</a:t>
+              <a:t>……</a:t>
             </a:r>
             <a:r>
               <a:rPr lang="en-US" altLang="zh-CN" dirty="0">
@@ -12814,7 +12814,79 @@
             <a:pPr lvl="1"/>
             <a:r>
               <a:rPr lang="zh-CN" altLang="en-US" dirty="0"/>
-              <a:t>模串下标：</a:t>
+              <a:t>主串下标：</a:t>
+            </a:r>
+            <a:r>
+              <a:rPr lang="en-US" altLang="zh-CN" dirty="0"/>
+              <a:t>…</a:t>
+            </a:r>
+            <a:r>
+              <a:rPr lang="en-US" altLang="zh-CN" dirty="0">
+                <a:solidFill>
+                  <a:srgbClr val="006600"/>
+                </a:solidFill>
+              </a:rPr>
+              <a:t> </a:t>
+            </a:r>
+            <a:r>
+              <a:rPr lang="en-US" altLang="zh-CN" b="1" u="sng" dirty="0">
+                <a:solidFill>
+                  <a:srgbClr val="006600"/>
+                </a:solidFill>
+                <a:uFill>
+                  <a:solidFill>
+                    <a:srgbClr val="006600"/>
+                  </a:solidFill>
+                </a:uFill>
+              </a:rPr>
+              <a:t>■ ………….…..… ■ … ■</a:t>
+            </a:r>
+            <a:r>
+              <a:rPr lang="en-US" altLang="zh-CN" b="1" u="sng" dirty="0">
+                <a:solidFill>
+                  <a:srgbClr val="006600"/>
+                </a:solidFill>
+              </a:rPr>
+              <a:t> </a:t>
+            </a:r>
+            <a:r>
+              <a:rPr lang="en-US" altLang="zh-CN" u="sng" dirty="0"/>
+              <a:t>(i-1)</a:t>
+            </a:r>
+            <a:r>
+              <a:rPr lang="en-US" altLang="zh-CN" b="1" dirty="0">
+                <a:solidFill>
+                  <a:srgbClr val="006600"/>
+                </a:solidFill>
+              </a:rPr>
+              <a:t>  </a:t>
+            </a:r>
+            <a:r>
+              <a:rPr lang="en-US" altLang="zh-CN" b="1" dirty="0" err="1">
+                <a:solidFill>
+                  <a:srgbClr val="FF0000"/>
+                </a:solidFill>
+              </a:rPr>
+              <a:t>i</a:t>
+            </a:r>
+            <a:r>
+              <a:rPr lang="en-US" altLang="zh-CN" b="1" dirty="0">
+                <a:solidFill>
+                  <a:srgbClr val="FF0000"/>
+                </a:solidFill>
+              </a:rPr>
+              <a:t>    </a:t>
+            </a:r>
+            <a:r>
+              <a:rPr lang="en-US" altLang="zh-CN" dirty="0"/>
+              <a:t>…(n-1)</a:t>
+            </a:r>
+          </a:p>
+          <a:p>
+            <a:pPr lvl="1"/>
+            <a:r>
+              <a:rPr lang="zh-CN" altLang="en-US" dirty="0"/>
+              <a:t>模串下标：    </a:t>
             </a:r>
             <a:r>
               <a:rPr lang="en-US" altLang="zh-CN" b="1" u="dbl" dirty="0">
@@ -12894,7 +12966,7 @@
                   </a:solidFill>
                 </a:uFill>
               </a:rPr>
-              <a:t> </a:t>
+              <a:t>   </a:t>
             </a:r>
             <a:r>
               <a:rPr lang="en-US" altLang="zh-CN" b="1" u="wavyDbl" dirty="0"/>
@@ -12902,7 +12974,7 @@
             </a:r>
             <a:r>
               <a:rPr lang="en-US" altLang="zh-CN" dirty="0"/>
-              <a:t> (</a:t>
+              <a:t>   (</a:t>
             </a:r>
             <a:r>
               <a:rPr lang="en-US" altLang="zh-CN" b="1" dirty="0">
@@ -12957,7 +13029,7 @@
             </a:r>
             <a:r>
               <a:rPr lang="zh-CN" altLang="en-US" dirty="0"/>
-              <a:t>：                 </a:t>
+              <a:t>：                     </a:t>
             </a:r>
             <a:r>
               <a:rPr lang="en-US" altLang="zh-CN" b="1" u="dbl" dirty="0">
@@ -12983,7 +13055,7 @@
                   </a:solidFill>
                 </a:uFill>
               </a:rPr>
-              <a:t> </a:t>
+              <a:t>   </a:t>
             </a:r>
             <a:r>
               <a:rPr lang="en-US" altLang="zh-CN" b="1" u="heavy" dirty="0">
@@ -12994,95 +13066,28 @@
               <a:t>k</a:t>
             </a:r>
             <a:r>
-              <a:rPr lang="zh-CN" altLang="en-US" dirty="0">
-                <a:solidFill>
-                  <a:srgbClr val="006600"/>
-                </a:solidFill>
-              </a:rPr>
-              <a:t> </a:t>
-            </a:r>
-            <a:r>
-              <a:rPr lang="en-US" altLang="zh-CN" dirty="0"/>
-              <a:t>…</a:t>
-            </a:r>
-            <a:r>
-              <a:rPr lang="en-US" altLang="zh-CN" dirty="0">
-                <a:solidFill>
-                  <a:srgbClr val="006600"/>
-                </a:solidFill>
-              </a:rPr>
-              <a:t> </a:t>
-            </a:r>
-            <a:endParaRPr lang="en-US" altLang="zh-CN" dirty="0"/>
-          </a:p>
-          <a:p>
-            <a:r>
-              <a:rPr lang="zh-CN" altLang="en-US" dirty="0"/>
-              <a:t>如果</a:t>
-            </a:r>
-            <a:r>
-              <a:rPr lang="en-US" altLang="zh-CN" dirty="0"/>
-              <a:t>p[</a:t>
-            </a:r>
-            <a:r>
               <a:rPr lang="en-US" altLang="zh-CN" b="1" dirty="0">
                 <a:solidFill>
                   <a:schemeClr val="accent2"/>
                 </a:solidFill>
               </a:rPr>
-              <a:t>k</a:t>
-            </a:r>
-            <a:r>
-              <a:rPr lang="en-US" altLang="zh-CN" dirty="0"/>
-              <a:t>]=p[</a:t>
-            </a:r>
-            <a:r>
-              <a:rPr lang="en-US" altLang="zh-CN" b="1" dirty="0"/>
-              <a:t>j</a:t>
-            </a:r>
-            <a:r>
-              <a:rPr lang="en-US" altLang="zh-CN" dirty="0"/>
-              <a:t>]</a:t>
-            </a:r>
-            <a:r>
-              <a:rPr lang="zh-CN" altLang="en-US" dirty="0"/>
-              <a:t>，那么</a:t>
-            </a:r>
-            <a:r>
-              <a:rPr lang="en-US" altLang="zh-CN" dirty="0"/>
-              <a:t>next[</a:t>
-            </a:r>
-            <a:r>
-              <a:rPr lang="en-US" altLang="zh-CN" b="1" dirty="0"/>
-              <a:t>j+1</a:t>
-            </a:r>
-            <a:r>
-              <a:rPr lang="en-US" altLang="zh-CN" dirty="0"/>
-              <a:t>]=</a:t>
+              <a:t>  </a:t>
+            </a:r>
+            <a:r>
+              <a:rPr lang="en-US" altLang="zh-CN" dirty="0"/>
+              <a:t>(</a:t>
             </a:r>
             <a:r>
               <a:rPr lang="en-US" altLang="zh-CN" b="1" dirty="0">
                 <a:solidFill>
-                  <a:schemeClr val="accent2"/>
+                  <a:srgbClr val="FF0000"/>
                 </a:solidFill>
               </a:rPr>
-              <a:t>k</a:t>
-            </a:r>
-            <a:r>
-              <a:rPr lang="en-US" altLang="zh-CN" dirty="0"/>
-              <a:t>+1=next[</a:t>
-            </a:r>
-            <a:r>
-              <a:rPr lang="en-US" altLang="zh-CN" b="1" dirty="0"/>
-              <a:t>j</a:t>
-            </a:r>
-            <a:r>
-              <a:rPr lang="en-US" altLang="zh-CN" dirty="0"/>
-              <a:t>]+1</a:t>
-            </a:r>
-            <a:r>
-              <a:rPr lang="zh-CN" altLang="en-US" dirty="0"/>
-              <a:t>。</a:t>
+              <a:t>k+1</a:t>
+            </a:r>
+            <a:r>
+              <a:rPr lang="en-US" altLang="zh-CN" dirty="0"/>
+              <a:t>)…….(m-1)</a:t>
             </a:r>
             <a:endParaRPr lang="zh-CN" altLang="en-US" b="0" dirty="0">
               <a:latin typeface="微软雅黑" panose="020B0503020204020204" pitchFamily="34" charset="-122"/>
@@ -13221,47 +13226,6 @@
       </p:grpSpPr>
       <p:sp>
         <p:nvSpPr>
-          <p:cNvPr id="2" name="标题 1">
-            <a:extLst>
-              <a:ext uri="{FF2B5EF4-FFF2-40B4-BE49-F238E27FC236}">
-                <a16:creationId xmlns:a16="http://schemas.microsoft.com/office/drawing/2014/main" id="{564074EB-EB4D-43CA-8C19-442B35BAE176}"/>
-              </a:ext>
-            </a:extLst>
-          </p:cNvPr>
-          <p:cNvSpPr>
-            <a:spLocks noGrp="1"/>
-          </p:cNvSpPr>
-          <p:nvPr>
-            <p:ph type="title"/>
-          </p:nvPr>
-        </p:nvSpPr>
-        <p:spPr/>
-        <p:txBody>
-          <a:bodyPr/>
-          <a:lstStyle/>
-          <a:p>
-            <a:r>
-              <a:rPr lang="zh-CN" altLang="en-US" dirty="0"/>
-              <a:t>已知</a:t>
-            </a:r>
-            <a:r>
-              <a:rPr lang="en-US" altLang="zh-CN" dirty="0"/>
-              <a:t>next[j]=k, </a:t>
-            </a:r>
-            <a:r>
-              <a:rPr lang="zh-CN" altLang="en-US" dirty="0"/>
-              <a:t>求</a:t>
-            </a:r>
-            <a:r>
-              <a:rPr lang="en-US" altLang="zh-CN" dirty="0"/>
-              <a:t>next[j+1]</a:t>
-            </a:r>
-            <a:endParaRPr lang="zh-CN" altLang="en-US" dirty="0"/>
-          </a:p>
-        </p:txBody>
-      </p:sp>
-      <p:sp>
-        <p:nvSpPr>
           <p:cNvPr id="3" name="内容占位符 2">
             <a:extLst>
               <a:ext uri="{FF2B5EF4-FFF2-40B4-BE49-F238E27FC236}">
@@ -13278,13 +13242,84 @@
         </p:nvSpPr>
         <p:spPr>
           <a:xfrm>
-            <a:off x="304800" y="1143000"/>
+            <a:off x="304800" y="609600"/>
             <a:ext cx="11582400" cy="5486400"/>
           </a:xfrm>
         </p:spPr>
         <p:txBody>
           <a:bodyPr/>
           <a:lstStyle/>
+          <a:p>
+            <a:r>
+              <a:rPr lang="zh-CN" altLang="en-US" dirty="0"/>
+              <a:t>如果</a:t>
+            </a:r>
+            <a:r>
+              <a:rPr lang="en-US" altLang="zh-CN" dirty="0"/>
+              <a:t>p[</a:t>
+            </a:r>
+            <a:r>
+              <a:rPr lang="en-US" altLang="zh-CN" b="1" dirty="0">
+                <a:solidFill>
+                  <a:schemeClr val="accent2"/>
+                </a:solidFill>
+              </a:rPr>
+              <a:t>k</a:t>
+            </a:r>
+            <a:r>
+              <a:rPr lang="en-US" altLang="zh-CN" dirty="0"/>
+              <a:t>]=p[</a:t>
+            </a:r>
+            <a:r>
+              <a:rPr lang="en-US" altLang="zh-CN" b="1" dirty="0"/>
+              <a:t>j</a:t>
+            </a:r>
+            <a:r>
+              <a:rPr lang="en-US" altLang="zh-CN" dirty="0"/>
+              <a:t>]</a:t>
+            </a:r>
+            <a:r>
+              <a:rPr lang="zh-CN" altLang="en-US" dirty="0"/>
+              <a:t>，那么</a:t>
+            </a:r>
+            <a:r>
+              <a:rPr lang="en-US" altLang="zh-CN" dirty="0"/>
+              <a:t>next[</a:t>
+            </a:r>
+            <a:r>
+              <a:rPr lang="en-US" altLang="zh-CN" b="1" dirty="0"/>
+              <a:t>j+1</a:t>
+            </a:r>
+            <a:r>
+              <a:rPr lang="en-US" altLang="zh-CN" dirty="0"/>
+              <a:t>]=</a:t>
+            </a:r>
+            <a:r>
+              <a:rPr lang="en-US" altLang="zh-CN" b="1" dirty="0">
+                <a:solidFill>
+                  <a:schemeClr val="accent2"/>
+                </a:solidFill>
+              </a:rPr>
+              <a:t>k</a:t>
+            </a:r>
+            <a:r>
+              <a:rPr lang="en-US" altLang="zh-CN" dirty="0"/>
+              <a:t>+1=next[</a:t>
+            </a:r>
+            <a:r>
+              <a:rPr lang="en-US" altLang="zh-CN" b="1" dirty="0"/>
+              <a:t>j</a:t>
+            </a:r>
+            <a:r>
+              <a:rPr lang="en-US" altLang="zh-CN" dirty="0"/>
+              <a:t>]+1</a:t>
+            </a:r>
+            <a:r>
+              <a:rPr lang="zh-CN" altLang="en-US" dirty="0"/>
+              <a:t>。</a:t>
+            </a:r>
+            <a:endParaRPr lang="en-US" altLang="zh-CN" dirty="0"/>
+          </a:p>
           <a:p>
             <a:pPr lvl="1"/>
             <a:r>
@@ -13369,11 +13404,11 @@
                   </a:solidFill>
                 </a:uFill>
               </a:rPr>
-              <a:t> </a:t>
+              <a:t>  </a:t>
             </a:r>
             <a:r>
               <a:rPr lang="en-US" altLang="zh-CN" b="1" u="wavyDbl" dirty="0"/>
-              <a:t>j</a:t>
+              <a:t>j </a:t>
             </a:r>
             <a:r>
               <a:rPr lang="en-US" altLang="zh-CN" dirty="0"/>
@@ -13458,7 +13493,7 @@
                   </a:solidFill>
                 </a:uFill>
               </a:rPr>
-              <a:t> </a:t>
+              <a:t>  </a:t>
             </a:r>
             <a:r>
               <a:rPr lang="en-US" altLang="zh-CN" b="1" u="heavy" dirty="0">
@@ -13469,16 +13504,28 @@
               <a:t>k</a:t>
             </a:r>
             <a:r>
-              <a:rPr lang="zh-CN" altLang="en-US" dirty="0">
+              <a:rPr lang="en-US" altLang="zh-CN" b="1" dirty="0">
                 <a:solidFill>
-                  <a:srgbClr val="006600"/>
+                  <a:schemeClr val="accent2"/>
                 </a:solidFill>
               </a:rPr>
               <a:t> </a:t>
             </a:r>
             <a:r>
               <a:rPr lang="en-US" altLang="zh-CN" dirty="0"/>
-              <a:t>…</a:t>
+              <a:t>(</a:t>
+            </a:r>
+            <a:r>
+              <a:rPr lang="en-US" altLang="zh-CN" b="1" dirty="0">
+                <a:solidFill>
+                  <a:srgbClr val="FF0000"/>
+                </a:solidFill>
+              </a:rPr>
+              <a:t>k+1</a:t>
+            </a:r>
+            <a:r>
+              <a:rPr lang="en-US" altLang="zh-CN" dirty="0"/>
+              <a:t>)……(m-1)</a:t>
             </a:r>
             <a:r>
               <a:rPr lang="en-US" altLang="zh-CN" dirty="0">
@@ -13694,7 +13741,7 @@
             </a:r>
             <a:r>
               <a:rPr lang="en-US" altLang="zh-CN" dirty="0"/>
-              <a:t> (</a:t>
+              <a:t>  (</a:t>
             </a:r>
             <a:r>
               <a:rPr lang="en-US" altLang="zh-CN" b="1" dirty="0">
@@ -13778,6 +13825,22 @@
               <a:t> </a:t>
             </a:r>
             <a:r>
+              <a:rPr lang="en-US" altLang="zh-CN" dirty="0"/>
+              <a:t>(</a:t>
+            </a:r>
+            <a:r>
+              <a:rPr lang="en-US" altLang="zh-CN" b="1" dirty="0">
+                <a:solidFill>
+                  <a:srgbClr val="FF0000"/>
+                </a:solidFill>
+              </a:rPr>
+              <a:t>r+1</a:t>
+            </a:r>
+            <a:r>
+              <a:rPr lang="en-US" altLang="zh-CN" dirty="0"/>
+              <a:t>)</a:t>
+            </a:r>
+            <a:r>
               <a:rPr lang="en-US" altLang="zh-CN" b="1" dirty="0">
                 <a:solidFill>
                   <a:srgbClr val="006600"/>
@@ -13788,7 +13851,7 @@
                   </a:solidFill>
                 </a:uFill>
               </a:rPr>
-              <a:t>…</a:t>
+              <a:t>……</a:t>
             </a:r>
             <a:r>
               <a:rPr lang="en-US" altLang="zh-CN" b="1" dirty="0">
@@ -13798,6 +13861,28 @@
               </a:rPr>
               <a:t>k</a:t>
             </a:r>
+            <a:r>
+              <a:rPr lang="en-US" altLang="zh-CN" b="1" dirty="0">
+                <a:solidFill>
+                  <a:srgbClr val="006600"/>
+                </a:solidFill>
+                <a:uFill>
+                  <a:solidFill>
+                    <a:schemeClr val="accent2"/>
+                  </a:solidFill>
+                </a:uFill>
+              </a:rPr>
+              <a:t> …</a:t>
+            </a:r>
+            <a:r>
+              <a:rPr lang="en-US" altLang="zh-CN" dirty="0"/>
+              <a:t>(m-1)</a:t>
+            </a:r>
+            <a:endParaRPr lang="en-US" altLang="zh-CN" b="1" dirty="0">
+              <a:solidFill>
+                <a:schemeClr val="accent2"/>
+              </a:solidFill>
+            </a:endParaRPr>
           </a:p>
           <a:p>
             <a:pPr lvl="1"/>
@@ -20837,7 +20922,15 @@
             </a:r>
             <a:r>
               <a:rPr lang="en-US" altLang="zh-CN" dirty="0"/>
-              <a:t>==NULL){</a:t>
+              <a:t>==</a:t>
+            </a:r>
+            <a:r>
+              <a:rPr lang="en-US" altLang="zh-CN" dirty="0" err="1"/>
+              <a:t>nullptr</a:t>
+            </a:r>
+            <a:r>
+              <a:rPr lang="en-US" altLang="zh-CN" dirty="0"/>
+              <a:t>){</a:t>
             </a:r>
           </a:p>
           <a:p>
@@ -21102,7 +21195,15 @@
             </a:r>
             <a:r>
               <a:rPr lang="en-US" altLang="zh-CN" dirty="0"/>
-              <a:t>=NULL;</a:t>
+              <a:t>=</a:t>
+            </a:r>
+            <a:r>
+              <a:rPr lang="en-US" altLang="zh-CN" dirty="0" err="1"/>
+              <a:t>nullptr</a:t>
+            </a:r>
+            <a:r>
+              <a:rPr lang="en-US" altLang="zh-CN" dirty="0"/>
+              <a:t>;</a:t>
             </a:r>
           </a:p>
           <a:p>
